--- a/curriculum/unit-1-what-is-a-service/module-1-3-dimensions-not-entities.pptx
+++ b/curriculum/unit-1-what-is-a-service/module-1-3-dimensions-not-entities.pptx
@@ -2060,7 +2060,7 @@
                 <a:ea typeface="Segoe UI" pitchFamily="34" charset="-122"/>
                 <a:cs typeface="Segoe UI" pitchFamily="34" charset="-120"/>
               </a:rPr>
-              <a:t>What split into separate entities in Classic becomes a dimension value in Latest</a:t>
+              <a:t>What split into separate entities under SDv1 becomes a dimension value with SDv2</a:t>
             </a:r>
             <a:endParaRPr lang="en-US" sz="2200" dirty="0"/>
           </a:p>
